--- a/ppts/MM2025StealthyAE.pptx
+++ b/ppts/MM2025StealthyAE.pptx
@@ -3328,10 +3328,10 @@
       </p:grpSpPr>
       <p:pic>
         <p:nvPicPr>
-          <p:cNvPr id="3" name="图片 2">
-            <a:extLst>
-              <a:ext uri="{FF2B5EF4-FFF2-40B4-BE49-F238E27FC236}">
-                <a16:creationId xmlns:a16="http://schemas.microsoft.com/office/drawing/2014/main" id="{F779E6E3-80F2-49FC-9C9D-CC749DE1C5A2}"/>
+          <p:cNvPr id="18" name="图片 17">
+            <a:extLst>
+              <a:ext uri="{FF2B5EF4-FFF2-40B4-BE49-F238E27FC236}">
+                <a16:creationId xmlns:a16="http://schemas.microsoft.com/office/drawing/2014/main" id="{DDEFF1DD-1728-4CF1-9FF7-C42BBC383270}"/>
               </a:ext>
             </a:extLst>
           </p:cNvPr>
@@ -3348,8 +3348,68 @@
         </p:blipFill>
         <p:spPr>
           <a:xfrm>
-            <a:off x="477236" y="2494759"/>
-            <a:ext cx="4861217" cy="2987675"/>
+            <a:off x="371296" y="2483592"/>
+            <a:ext cx="3603804" cy="2149685"/>
+          </a:xfrm>
+          <a:prstGeom prst="rect">
+            <a:avLst/>
+          </a:prstGeom>
+        </p:spPr>
+      </p:pic>
+      <p:pic>
+        <p:nvPicPr>
+          <p:cNvPr id="19" name="图片 18">
+            <a:extLst>
+              <a:ext uri="{FF2B5EF4-FFF2-40B4-BE49-F238E27FC236}">
+                <a16:creationId xmlns:a16="http://schemas.microsoft.com/office/drawing/2014/main" id="{57C558DB-F54A-44AE-92F9-4F3E3F86CC99}"/>
+              </a:ext>
+            </a:extLst>
+          </p:cNvPr>
+          <p:cNvPicPr>
+            <a:picLocks noChangeAspect="1"/>
+          </p:cNvPicPr>
+          <p:nvPr/>
+        </p:nvPicPr>
+        <p:blipFill>
+          <a:blip r:embed="rId4"/>
+          <a:stretch>
+            <a:fillRect/>
+          </a:stretch>
+        </p:blipFill>
+        <p:spPr>
+          <a:xfrm>
+            <a:off x="7862181" y="2393641"/>
+            <a:ext cx="3976872" cy="1557162"/>
+          </a:xfrm>
+          <a:prstGeom prst="rect">
+            <a:avLst/>
+          </a:prstGeom>
+        </p:spPr>
+      </p:pic>
+      <p:pic>
+        <p:nvPicPr>
+          <p:cNvPr id="20" name="图片 19">
+            <a:extLst>
+              <a:ext uri="{FF2B5EF4-FFF2-40B4-BE49-F238E27FC236}">
+                <a16:creationId xmlns:a16="http://schemas.microsoft.com/office/drawing/2014/main" id="{C7B540D8-26A4-4BE7-80A8-6CC1E1AD99FB}"/>
+              </a:ext>
+            </a:extLst>
+          </p:cNvPr>
+          <p:cNvPicPr>
+            <a:picLocks noChangeAspect="1"/>
+          </p:cNvPicPr>
+          <p:nvPr/>
+        </p:nvPicPr>
+        <p:blipFill>
+          <a:blip r:embed="rId5"/>
+          <a:stretch>
+            <a:fillRect/>
+          </a:stretch>
+        </p:blipFill>
+        <p:spPr>
+          <a:xfrm>
+            <a:off x="3962400" y="3964094"/>
+            <a:ext cx="4673600" cy="1602892"/>
           </a:xfrm>
           <a:prstGeom prst="rect">
             <a:avLst/>
@@ -3377,7 +3437,7 @@
             <a:avLst/>
           </a:prstGeom>
           <a:blipFill>
-            <a:blip r:embed="rId4" cstate="print"/>
+            <a:blip r:embed="rId6" cstate="print"/>
             <a:stretch>
               <a:fillRect/>
             </a:stretch>
@@ -4466,217 +4526,6 @@
       </p:sp>
       <p:sp>
         <p:nvSpPr>
-          <p:cNvPr id="23" name="文本框 19">
-            <a:extLst>
-              <a:ext uri="{FF2B5EF4-FFF2-40B4-BE49-F238E27FC236}">
-                <a16:creationId xmlns:a16="http://schemas.microsoft.com/office/drawing/2014/main" id="{F851F652-D5A5-417A-BBBB-EF142C5F73DB}"/>
-              </a:ext>
-            </a:extLst>
-          </p:cNvPr>
-          <p:cNvSpPr txBox="1"/>
-          <p:nvPr/>
-        </p:nvSpPr>
-        <p:spPr>
-          <a:xfrm>
-            <a:off x="6985190" y="5255856"/>
-            <a:ext cx="4581704" cy="338554"/>
-          </a:xfrm>
-          <a:prstGeom prst="rect">
-            <a:avLst/>
-          </a:prstGeom>
-          <a:noFill/>
-        </p:spPr>
-        <p:txBody>
-          <a:bodyPr wrap="square">
-            <a:spAutoFit/>
-          </a:bodyPr>
-          <a:lstStyle/>
-          <a:p>
-            <a:pPr algn="ctr"/>
-            <a:r>
-              <a:rPr lang="zh-CN" altLang="en-US" sz="1600" b="1" dirty="0">
-                <a:solidFill>
-                  <a:prstClr val="black"/>
-                </a:solidFill>
-                <a:latin typeface="微软雅黑" panose="020B0503020204020204" charset="-122"/>
-                <a:ea typeface="微软雅黑" panose="020B0503020204020204" charset="-122"/>
-              </a:rPr>
-              <a:t>计算不同 </a:t>
-            </a:r>
-            <a:r>
-              <a:rPr lang="en-US" altLang="zh-CN" sz="1600" b="1" dirty="0">
-                <a:solidFill>
-                  <a:prstClr val="black"/>
-                </a:solidFill>
-                <a:latin typeface="微软雅黑" panose="020B0503020204020204" charset="-122"/>
-                <a:ea typeface="微软雅黑" panose="020B0503020204020204" charset="-122"/>
-              </a:rPr>
-              <a:t>OSN </a:t>
-            </a:r>
-            <a:r>
-              <a:rPr lang="zh-CN" altLang="en-US" sz="1600" b="1" dirty="0">
-                <a:solidFill>
-                  <a:prstClr val="black"/>
-                </a:solidFill>
-                <a:latin typeface="微软雅黑" panose="020B0503020204020204" charset="-122"/>
-                <a:ea typeface="微软雅黑" panose="020B0503020204020204" charset="-122"/>
-              </a:rPr>
-              <a:t>的 </a:t>
-            </a:r>
-            <a:r>
-              <a:rPr lang="en-US" altLang="zh-CN" sz="1600" b="1" dirty="0">
-                <a:solidFill>
-                  <a:prstClr val="black"/>
-                </a:solidFill>
-                <a:latin typeface="微软雅黑" panose="020B0503020204020204" charset="-122"/>
-                <a:ea typeface="微软雅黑" panose="020B0503020204020204" charset="-122"/>
-              </a:rPr>
-              <a:t>JPEG quality factor</a:t>
-            </a:r>
-            <a:endParaRPr lang="zh-CN" altLang="en-US" sz="1600" b="1" dirty="0">
-              <a:solidFill>
-                <a:prstClr val="black"/>
-              </a:solidFill>
-              <a:latin typeface="微软雅黑" panose="020B0503020204020204" charset="-122"/>
-              <a:ea typeface="微软雅黑" panose="020B0503020204020204" charset="-122"/>
-            </a:endParaRPr>
-          </a:p>
-        </p:txBody>
-      </p:sp>
-      <p:sp>
-        <p:nvSpPr>
-          <p:cNvPr id="21" name="文本框 19">
-            <a:extLst>
-              <a:ext uri="{FF2B5EF4-FFF2-40B4-BE49-F238E27FC236}">
-                <a16:creationId xmlns:a16="http://schemas.microsoft.com/office/drawing/2014/main" id="{8AB882A9-B10F-4585-B6E2-A7DFCEA1E25A}"/>
-              </a:ext>
-            </a:extLst>
-          </p:cNvPr>
-          <p:cNvSpPr txBox="1"/>
-          <p:nvPr/>
-        </p:nvSpPr>
-        <p:spPr>
-          <a:xfrm>
-            <a:off x="5338453" y="2841982"/>
-            <a:ext cx="1375860" cy="2062103"/>
-          </a:xfrm>
-          <a:prstGeom prst="rect">
-            <a:avLst/>
-          </a:prstGeom>
-          <a:noFill/>
-        </p:spPr>
-        <p:txBody>
-          <a:bodyPr wrap="square">
-            <a:spAutoFit/>
-          </a:bodyPr>
-          <a:lstStyle/>
-          <a:p>
-            <a:pPr algn="ctr"/>
-            <a:r>
-              <a:rPr lang="zh-CN" altLang="en-US" sz="1600" b="1" dirty="0">
-                <a:solidFill>
-                  <a:prstClr val="black"/>
-                </a:solidFill>
-                <a:latin typeface="微软雅黑" panose="020B0503020204020204" charset="-122"/>
-                <a:ea typeface="微软雅黑" panose="020B0503020204020204" charset="-122"/>
-              </a:rPr>
-              <a:t>结合 </a:t>
-            </a:r>
-            <a:r>
-              <a:rPr lang="en-US" altLang="zh-CN" sz="1600" b="1" dirty="0">
-                <a:solidFill>
-                  <a:prstClr val="black"/>
-                </a:solidFill>
-                <a:latin typeface="微软雅黑" panose="020B0503020204020204" charset="-122"/>
-                <a:ea typeface="微软雅黑" panose="020B0503020204020204" charset="-122"/>
-              </a:rPr>
-              <a:t>diffusion model</a:t>
-            </a:r>
-            <a:r>
-              <a:rPr lang="zh-CN" altLang="en-US" sz="1600" b="1" dirty="0">
-                <a:solidFill>
-                  <a:prstClr val="black"/>
-                </a:solidFill>
-                <a:latin typeface="微软雅黑" panose="020B0503020204020204" charset="-122"/>
-                <a:ea typeface="微软雅黑" panose="020B0503020204020204" charset="-122"/>
-              </a:rPr>
-              <a:t>，与 </a:t>
-            </a:r>
-            <a:r>
-              <a:rPr lang="en-US" altLang="zh-CN" sz="1600" b="1" dirty="0">
-                <a:solidFill>
-                  <a:prstClr val="black"/>
-                </a:solidFill>
-                <a:latin typeface="微软雅黑" panose="020B0503020204020204" charset="-122"/>
-                <a:ea typeface="微软雅黑" panose="020B0503020204020204" charset="-122"/>
-              </a:rPr>
-              <a:t>differentiable JPEG layer </a:t>
-            </a:r>
-            <a:r>
-              <a:rPr lang="zh-CN" altLang="en-US" sz="1600" b="1" dirty="0">
-                <a:solidFill>
-                  <a:prstClr val="black"/>
-                </a:solidFill>
-                <a:latin typeface="微软雅黑" panose="020B0503020204020204" charset="-122"/>
-                <a:ea typeface="微软雅黑" panose="020B0503020204020204" charset="-122"/>
-              </a:rPr>
-              <a:t>构建可微分的 </a:t>
-            </a:r>
-            <a:r>
-              <a:rPr lang="en-US" altLang="zh-CN" sz="1600" b="1" dirty="0">
-                <a:solidFill>
-                  <a:prstClr val="black"/>
-                </a:solidFill>
-                <a:latin typeface="微软雅黑" panose="020B0503020204020204" charset="-122"/>
-                <a:ea typeface="微软雅黑" panose="020B0503020204020204" charset="-122"/>
-              </a:rPr>
-              <a:t>OSN </a:t>
-            </a:r>
-            <a:r>
-              <a:rPr lang="zh-CN" altLang="en-US" sz="1600" b="1" dirty="0">
-                <a:solidFill>
-                  <a:prstClr val="black"/>
-                </a:solidFill>
-                <a:latin typeface="微软雅黑" panose="020B0503020204020204" charset="-122"/>
-                <a:ea typeface="微软雅黑" panose="020B0503020204020204" charset="-122"/>
-              </a:rPr>
-              <a:t>传输模拟器</a:t>
-            </a:r>
-          </a:p>
-        </p:txBody>
-      </p:sp>
-      <p:pic>
-        <p:nvPicPr>
-          <p:cNvPr id="4" name="图片 3">
-            <a:extLst>
-              <a:ext uri="{FF2B5EF4-FFF2-40B4-BE49-F238E27FC236}">
-                <a16:creationId xmlns:a16="http://schemas.microsoft.com/office/drawing/2014/main" id="{9B7E990A-F66F-4313-8334-2A150771B881}"/>
-              </a:ext>
-            </a:extLst>
-          </p:cNvPr>
-          <p:cNvPicPr>
-            <a:picLocks noChangeAspect="1"/>
-          </p:cNvPicPr>
-          <p:nvPr/>
-        </p:nvPicPr>
-        <p:blipFill>
-          <a:blip r:embed="rId5"/>
-          <a:stretch>
-            <a:fillRect/>
-          </a:stretch>
-        </p:blipFill>
-        <p:spPr>
-          <a:xfrm>
-            <a:off x="6853548" y="2513736"/>
-            <a:ext cx="4831957" cy="2718596"/>
-          </a:xfrm>
-          <a:prstGeom prst="rect">
-            <a:avLst/>
-          </a:prstGeom>
-        </p:spPr>
-      </p:pic>
-      <p:sp>
-        <p:nvSpPr>
           <p:cNvPr id="49" name="矩形: 圆角 28">
             <a:extLst>
               <a:ext uri="{FF2B5EF4-FFF2-40B4-BE49-F238E27FC236}">
@@ -4836,67 +4685,346 @@
                 <a:latin typeface="微软雅黑" panose="020B0503020204020204" charset="-122"/>
                 <a:ea typeface="微软雅黑" panose="020B0503020204020204" charset="-122"/>
               </a:rPr>
-              <a:t>：图像在上传前表现为正常样本，但经过 </a:t>
+              <a:t>：图像在上传前表现为正常样本，但经过</a:t>
+            </a:r>
+            <a:r>
+              <a:rPr lang="zh-CN" altLang="en-US" sz="2000" b="1" dirty="0">
+                <a:solidFill>
+                  <a:srgbClr val="FF0000"/>
+                </a:solidFill>
+                <a:latin typeface="微软雅黑" panose="020B0503020204020204" charset="-122"/>
+                <a:ea typeface="微软雅黑" panose="020B0503020204020204" charset="-122"/>
+              </a:rPr>
+              <a:t> </a:t>
             </a:r>
             <a:r>
               <a:rPr lang="en-US" altLang="zh-CN" sz="2000" b="1" dirty="0">
                 <a:solidFill>
+                  <a:srgbClr val="C00000"/>
+                </a:solidFill>
+                <a:latin typeface="微软雅黑" panose="020B0503020204020204" charset="-122"/>
+                <a:ea typeface="微软雅黑" panose="020B0503020204020204" charset="-122"/>
+              </a:rPr>
+              <a:t>Facebook</a:t>
+            </a:r>
+            <a:r>
+              <a:rPr lang="zh-CN" altLang="en-US" sz="2000" b="1" dirty="0">
+                <a:solidFill>
+                  <a:srgbClr val="C00000"/>
+                </a:solidFill>
+                <a:latin typeface="微软雅黑" panose="020B0503020204020204" charset="-122"/>
+                <a:ea typeface="微软雅黑" panose="020B0503020204020204" charset="-122"/>
+              </a:rPr>
+              <a:t>、</a:t>
+            </a:r>
+            <a:r>
+              <a:rPr lang="en-US" altLang="zh-CN" sz="2000" b="1" dirty="0">
+                <a:solidFill>
+                  <a:srgbClr val="C00000"/>
+                </a:solidFill>
+                <a:latin typeface="微软雅黑" panose="020B0503020204020204" charset="-122"/>
+                <a:ea typeface="微软雅黑" panose="020B0503020204020204" charset="-122"/>
+              </a:rPr>
+              <a:t>QQ</a:t>
+            </a:r>
+            <a:r>
+              <a:rPr lang="zh-CN" altLang="en-US" sz="2000" b="1" dirty="0">
+                <a:solidFill>
+                  <a:srgbClr val="C00000"/>
+                </a:solidFill>
+                <a:latin typeface="微软雅黑" panose="020B0503020204020204" charset="-122"/>
+                <a:ea typeface="微软雅黑" panose="020B0503020204020204" charset="-122"/>
+              </a:rPr>
+              <a:t>、</a:t>
+            </a:r>
+            <a:r>
+              <a:rPr lang="en-US" altLang="zh-CN" sz="2000" b="1" dirty="0">
+                <a:solidFill>
+                  <a:srgbClr val="C00000"/>
+                </a:solidFill>
+                <a:latin typeface="微软雅黑" panose="020B0503020204020204" charset="-122"/>
+                <a:ea typeface="微软雅黑" panose="020B0503020204020204" charset="-122"/>
+              </a:rPr>
+              <a:t>WeChat </a:t>
+            </a:r>
+            <a:r>
+              <a:rPr lang="zh-CN" altLang="en-US" sz="2000" b="1" dirty="0">
+                <a:solidFill>
+                  <a:srgbClr val="C00000"/>
+                </a:solidFill>
+                <a:latin typeface="微软雅黑" panose="020B0503020204020204" charset="-122"/>
+                <a:ea typeface="微软雅黑" panose="020B0503020204020204" charset="-122"/>
+              </a:rPr>
+              <a:t>等社交网络</a:t>
+            </a:r>
+            <a:r>
+              <a:rPr lang="zh-CN" altLang="en-US" sz="2000" b="1" dirty="0">
+                <a:solidFill>
                   <a:prstClr val="black"/>
                 </a:solidFill>
                 <a:latin typeface="微软雅黑" panose="020B0503020204020204" charset="-122"/>
                 <a:ea typeface="微软雅黑" panose="020B0503020204020204" charset="-122"/>
               </a:rPr>
-              <a:t>Facebook</a:t>
-            </a:r>
-            <a:r>
-              <a:rPr lang="zh-CN" altLang="en-US" sz="2000" b="1" dirty="0">
-                <a:solidFill>
-                  <a:prstClr val="black"/>
-                </a:solidFill>
-                <a:latin typeface="微软雅黑" panose="020B0503020204020204" charset="-122"/>
-                <a:ea typeface="微软雅黑" panose="020B0503020204020204" charset="-122"/>
-              </a:rPr>
-              <a:t>、</a:t>
-            </a:r>
-            <a:r>
-              <a:rPr lang="en-US" altLang="zh-CN" sz="2000" b="1" dirty="0">
-                <a:solidFill>
-                  <a:prstClr val="black"/>
-                </a:solidFill>
-                <a:latin typeface="微软雅黑" panose="020B0503020204020204" charset="-122"/>
-                <a:ea typeface="微软雅黑" panose="020B0503020204020204" charset="-122"/>
-              </a:rPr>
-              <a:t>QQ</a:t>
-            </a:r>
-            <a:r>
-              <a:rPr lang="zh-CN" altLang="en-US" sz="2000" b="1" dirty="0">
-                <a:solidFill>
-                  <a:prstClr val="black"/>
-                </a:solidFill>
-                <a:latin typeface="微软雅黑" panose="020B0503020204020204" charset="-122"/>
-                <a:ea typeface="微软雅黑" panose="020B0503020204020204" charset="-122"/>
-              </a:rPr>
-              <a:t>、</a:t>
-            </a:r>
-            <a:r>
-              <a:rPr lang="en-US" altLang="zh-CN" sz="2000" b="1" dirty="0">
-                <a:solidFill>
-                  <a:prstClr val="black"/>
-                </a:solidFill>
-                <a:latin typeface="微软雅黑" panose="020B0503020204020204" charset="-122"/>
-                <a:ea typeface="微软雅黑" panose="020B0503020204020204" charset="-122"/>
-              </a:rPr>
-              <a:t>WeChat </a:t>
-            </a:r>
-            <a:r>
-              <a:rPr lang="zh-CN" altLang="en-US" sz="2000" b="1" dirty="0">
-                <a:solidFill>
-                  <a:prstClr val="black"/>
-                </a:solidFill>
-                <a:latin typeface="微软雅黑" panose="020B0503020204020204" charset="-122"/>
-                <a:ea typeface="微软雅黑" panose="020B0503020204020204" charset="-122"/>
-              </a:rPr>
-              <a:t>等社交网络处理后被“激活”为对抗样本。</a:t>
+              <a:t>处理后被“激活”为对抗样本。</a:t>
+            </a:r>
+          </a:p>
+        </p:txBody>
+      </p:sp>
+      <p:sp>
+        <p:nvSpPr>
+          <p:cNvPr id="15" name="文本框 20">
+            <a:extLst>
+              <a:ext uri="{FF2B5EF4-FFF2-40B4-BE49-F238E27FC236}">
+                <a16:creationId xmlns:a16="http://schemas.microsoft.com/office/drawing/2014/main" id="{645D9392-731F-48C6-BBDB-EA66B09E095A}"/>
+              </a:ext>
+            </a:extLst>
+          </p:cNvPr>
+          <p:cNvSpPr txBox="1"/>
+          <p:nvPr/>
+        </p:nvSpPr>
+        <p:spPr>
+          <a:xfrm>
+            <a:off x="558861" y="4691132"/>
+            <a:ext cx="3065056" cy="830997"/>
+          </a:xfrm>
+          <a:prstGeom prst="rect">
+            <a:avLst/>
+          </a:prstGeom>
+          <a:noFill/>
+        </p:spPr>
+        <p:txBody>
+          <a:bodyPr wrap="square">
+            <a:spAutoFit/>
+          </a:bodyPr>
+          <a:lstStyle/>
+          <a:p>
+            <a:pPr algn="ctr"/>
+            <a:r>
+              <a:rPr lang="zh-CN" altLang="en-US" sz="1600" b="1" dirty="0">
+                <a:effectLst/>
+                <a:latin typeface="微软雅黑" panose="020B0503020204020204" charset="-122"/>
+                <a:ea typeface="微软雅黑" panose="020B0503020204020204" charset="-122"/>
+              </a:rPr>
+              <a:t>真实数据链路中的压缩和转换会</a:t>
+            </a:r>
+            <a:r>
+              <a:rPr lang="zh-CN" altLang="en-US" sz="1600" b="1" dirty="0">
+                <a:solidFill>
+                  <a:srgbClr val="C00000"/>
+                </a:solidFill>
+                <a:effectLst/>
+                <a:latin typeface="微软雅黑" panose="020B0503020204020204" charset="-122"/>
+                <a:ea typeface="微软雅黑" panose="020B0503020204020204" charset="-122"/>
+              </a:rPr>
+              <a:t>改变样本特征</a:t>
+            </a:r>
+            <a:r>
+              <a:rPr lang="zh-CN" altLang="en-US" sz="1600" b="1" dirty="0">
+                <a:effectLst/>
+                <a:latin typeface="微软雅黑" panose="020B0503020204020204" charset="-122"/>
+                <a:ea typeface="微软雅黑" panose="020B0503020204020204" charset="-122"/>
+              </a:rPr>
+              <a:t>，使原本正常样本在后续处理后</a:t>
+            </a:r>
+            <a:r>
+              <a:rPr lang="zh-CN" altLang="en-US" sz="1600" b="1" dirty="0">
+                <a:solidFill>
+                  <a:srgbClr val="C00000"/>
+                </a:solidFill>
+                <a:effectLst/>
+                <a:latin typeface="微软雅黑" panose="020B0503020204020204" charset="-122"/>
+                <a:ea typeface="微软雅黑" panose="020B0503020204020204" charset="-122"/>
+              </a:rPr>
+              <a:t>变为异常样本</a:t>
+            </a:r>
+            <a:r>
+              <a:rPr lang="zh-CN" altLang="en-US" sz="1600" b="1" dirty="0">
+                <a:effectLst/>
+                <a:latin typeface="微软雅黑" panose="020B0503020204020204" charset="-122"/>
+                <a:ea typeface="微软雅黑" panose="020B0503020204020204" charset="-122"/>
+              </a:rPr>
+              <a:t>。</a:t>
+            </a:r>
+            <a:endParaRPr lang="zh-CN" altLang="en-US" sz="1600" b="1" dirty="0">
+              <a:solidFill>
+                <a:srgbClr val="C00000"/>
+              </a:solidFill>
+              <a:effectLst/>
+              <a:latin typeface="微软雅黑" panose="020B0503020204020204" charset="-122"/>
+              <a:ea typeface="微软雅黑" panose="020B0503020204020204" charset="-122"/>
+            </a:endParaRPr>
+          </a:p>
+        </p:txBody>
+      </p:sp>
+      <p:sp>
+        <p:nvSpPr>
+          <p:cNvPr id="16" name="文本框 20">
+            <a:extLst>
+              <a:ext uri="{FF2B5EF4-FFF2-40B4-BE49-F238E27FC236}">
+                <a16:creationId xmlns:a16="http://schemas.microsoft.com/office/drawing/2014/main" id="{6EF1162F-4576-4F9E-830B-F908972DB106}"/>
+              </a:ext>
+            </a:extLst>
+          </p:cNvPr>
+          <p:cNvSpPr txBox="1"/>
+          <p:nvPr/>
+        </p:nvSpPr>
+        <p:spPr>
+          <a:xfrm>
+            <a:off x="4412309" y="2588204"/>
+            <a:ext cx="3367382" cy="830997"/>
+          </a:xfrm>
+          <a:prstGeom prst="rect">
+            <a:avLst/>
+          </a:prstGeom>
+          <a:noFill/>
+        </p:spPr>
+        <p:txBody>
+          <a:bodyPr wrap="square">
+            <a:spAutoFit/>
+          </a:bodyPr>
+          <a:lstStyle/>
+          <a:p>
+            <a:pPr algn="ctr"/>
+            <a:r>
+              <a:rPr lang="zh-CN" altLang="en-US" sz="1600" b="1" dirty="0">
+                <a:solidFill>
+                  <a:srgbClr val="C00000"/>
+                </a:solidFill>
+                <a:latin typeface="微软雅黑" panose="020B0503020204020204" charset="-122"/>
+                <a:ea typeface="微软雅黑" panose="020B0503020204020204" charset="-122"/>
+              </a:rPr>
+              <a:t>联合建模</a:t>
+            </a:r>
+            <a:r>
+              <a:rPr lang="zh-CN" altLang="en-US" sz="1600" b="1" dirty="0">
+                <a:latin typeface="微软雅黑" panose="020B0503020204020204" charset="-122"/>
+                <a:ea typeface="微软雅黑" panose="020B0503020204020204" charset="-122"/>
+              </a:rPr>
+              <a:t>传输过程与判别模型，在“传输前正常、传输后异常”的约束下生成困难样本。</a:t>
+            </a:r>
+            <a:endParaRPr lang="zh-CN" altLang="en-US" sz="1600" b="1" dirty="0">
+              <a:effectLst/>
+              <a:latin typeface="微软雅黑" panose="020B0503020204020204" charset="-122"/>
+              <a:ea typeface="微软雅黑" panose="020B0503020204020204" charset="-122"/>
+            </a:endParaRPr>
+          </a:p>
+        </p:txBody>
+      </p:sp>
+      <p:sp>
+        <p:nvSpPr>
+          <p:cNvPr id="17" name="文本框 20">
+            <a:extLst>
+              <a:ext uri="{FF2B5EF4-FFF2-40B4-BE49-F238E27FC236}">
+                <a16:creationId xmlns:a16="http://schemas.microsoft.com/office/drawing/2014/main" id="{F4A03847-F66D-4D8E-AE9A-36431B63287E}"/>
+              </a:ext>
+            </a:extLst>
+          </p:cNvPr>
+          <p:cNvSpPr txBox="1"/>
+          <p:nvPr/>
+        </p:nvSpPr>
+        <p:spPr>
+          <a:xfrm>
+            <a:off x="8698799" y="4525816"/>
+            <a:ext cx="3247925" cy="830997"/>
+          </a:xfrm>
+          <a:prstGeom prst="rect">
+            <a:avLst/>
+          </a:prstGeom>
+          <a:noFill/>
+        </p:spPr>
+        <p:txBody>
+          <a:bodyPr wrap="square">
+            <a:spAutoFit/>
+          </a:bodyPr>
+          <a:lstStyle/>
+          <a:p>
+            <a:pPr algn="ctr"/>
+            <a:r>
+              <a:rPr lang="zh-CN" altLang="en-US" sz="1600" b="1" dirty="0">
+                <a:effectLst/>
+                <a:latin typeface="微软雅黑" panose="020B0503020204020204" charset="-122"/>
+                <a:ea typeface="微软雅黑" panose="020B0503020204020204" charset="-122"/>
+              </a:rPr>
+              <a:t>通过</a:t>
+            </a:r>
+            <a:r>
+              <a:rPr lang="zh-CN" altLang="en-US" sz="1600" b="1" dirty="0">
+                <a:solidFill>
+                  <a:srgbClr val="C00000"/>
+                </a:solidFill>
+                <a:effectLst/>
+                <a:latin typeface="微软雅黑" panose="020B0503020204020204" charset="-122"/>
+                <a:ea typeface="微软雅黑" panose="020B0503020204020204" charset="-122"/>
+              </a:rPr>
+              <a:t>可微 </a:t>
+            </a:r>
+            <a:r>
+              <a:rPr lang="en-US" altLang="zh-CN" sz="1600" b="1" dirty="0">
+                <a:solidFill>
+                  <a:srgbClr val="C00000"/>
+                </a:solidFill>
+                <a:effectLst/>
+                <a:latin typeface="微软雅黑" panose="020B0503020204020204" charset="-122"/>
+                <a:ea typeface="微软雅黑" panose="020B0503020204020204" charset="-122"/>
+              </a:rPr>
+              <a:t>JPEG </a:t>
+            </a:r>
+            <a:r>
+              <a:rPr lang="zh-CN" altLang="en-US" sz="1600" b="1" dirty="0">
+                <a:solidFill>
+                  <a:srgbClr val="C00000"/>
+                </a:solidFill>
+                <a:effectLst/>
+                <a:latin typeface="微软雅黑" panose="020B0503020204020204" charset="-122"/>
+                <a:ea typeface="微软雅黑" panose="020B0503020204020204" charset="-122"/>
+              </a:rPr>
+              <a:t>层</a:t>
+            </a:r>
+            <a:r>
+              <a:rPr lang="zh-CN" altLang="en-US" sz="1600" b="1" dirty="0">
+                <a:effectLst/>
+                <a:latin typeface="微软雅黑" panose="020B0503020204020204" charset="-122"/>
+                <a:ea typeface="微软雅黑" panose="020B0503020204020204" charset="-122"/>
+              </a:rPr>
+              <a:t>和</a:t>
+            </a:r>
+            <a:r>
+              <a:rPr lang="zh-CN" altLang="en-US" sz="1600" b="1" dirty="0">
+                <a:solidFill>
+                  <a:srgbClr val="C00000"/>
+                </a:solidFill>
+                <a:effectLst/>
+                <a:latin typeface="微软雅黑" panose="020B0503020204020204" charset="-122"/>
+                <a:ea typeface="微软雅黑" panose="020B0503020204020204" charset="-122"/>
+              </a:rPr>
+              <a:t>扩散模型</a:t>
+            </a:r>
+            <a:r>
+              <a:rPr lang="zh-CN" altLang="en-US" sz="1600" b="1" dirty="0">
+                <a:effectLst/>
+                <a:latin typeface="微软雅黑" panose="020B0503020204020204" charset="-122"/>
+                <a:ea typeface="微软雅黑" panose="020B0503020204020204" charset="-122"/>
+              </a:rPr>
+              <a:t>模拟真实数据变换，为端到端鲁棒优化提供</a:t>
+            </a:r>
+            <a:r>
+              <a:rPr lang="zh-CN" altLang="en-US" sz="1600" b="1" dirty="0">
+                <a:solidFill>
+                  <a:srgbClr val="C00000"/>
+                </a:solidFill>
+                <a:effectLst/>
+                <a:latin typeface="微软雅黑" panose="020B0503020204020204" charset="-122"/>
+                <a:ea typeface="微软雅黑" panose="020B0503020204020204" charset="-122"/>
+              </a:rPr>
+              <a:t>可训练扰动环境</a:t>
+            </a:r>
+            <a:r>
+              <a:rPr lang="zh-CN" altLang="en-US" sz="1600" b="1" dirty="0">
+                <a:effectLst/>
+                <a:latin typeface="微软雅黑" panose="020B0503020204020204" charset="-122"/>
+                <a:ea typeface="微软雅黑" panose="020B0503020204020204" charset="-122"/>
+              </a:rPr>
+              <a:t>。</a:t>
             </a:r>
           </a:p>
         </p:txBody>
